--- a/AI Fundamentals Course/Week 1/Week1_Slides_Foundations_of_AI.pptx
+++ b/AI Fundamentals Course/Week 1/Week1_Slides_Foundations_of_AI.pptx
@@ -3834,7 +3834,7 @@
                 <a:ea typeface="Calibri" pitchFamily="34" charset="-122"/>
                 <a:cs typeface="Calibri" pitchFamily="34" charset="-120"/>
               </a:rPr>
-              <a:t>Proxiant AI Academy</a:t>
+              <a:t>Proxiant Academy</a:t>
             </a:r>
             <a:endParaRPr lang="en-US" sz="1600" dirty="0"/>
           </a:p>
@@ -3859,6 +3859,10 @@
           </a:solidFill>
           <a:ln/>
         </p:spPr>
+        <p:txBody>
+          <a:bodyPr/>
+          <a:p/>
+        </p:txBody>
       </p:sp>
     </p:spTree>
   </p:cSld>
@@ -3950,6 +3954,10 @@
           </a:solidFill>
           <a:ln/>
         </p:spPr>
+        <p:txBody>
+          <a:bodyPr/>
+          <a:p/>
+        </p:txBody>
       </p:sp>
       <p:sp>
         <p:nvSpPr>
@@ -4048,6 +4056,10 @@
           </a:solidFill>
           <a:ln/>
         </p:spPr>
+        <p:txBody>
+          <a:bodyPr/>
+          <a:p/>
+        </p:txBody>
       </p:sp>
       <p:sp>
         <p:nvSpPr>
@@ -4146,6 +4158,10 @@
           </a:solidFill>
           <a:ln/>
         </p:spPr>
+        <p:txBody>
+          <a:bodyPr/>
+          <a:p/>
+        </p:txBody>
       </p:sp>
       <p:sp>
         <p:nvSpPr>
@@ -4244,6 +4260,10 @@
           </a:solidFill>
           <a:ln/>
         </p:spPr>
+        <p:txBody>
+          <a:bodyPr/>
+          <a:p/>
+        </p:txBody>
       </p:sp>
       <p:sp>
         <p:nvSpPr>
@@ -4342,6 +4362,10 @@
           </a:solidFill>
           <a:ln/>
         </p:spPr>
+        <p:txBody>
+          <a:bodyPr/>
+          <a:p/>
+        </p:txBody>
       </p:sp>
       <p:sp>
         <p:nvSpPr>
@@ -4516,6 +4540,10 @@
             <a:prstDash val="solid"/>
           </a:ln>
         </p:spPr>
+        <p:txBody>
+          <a:bodyPr/>
+          <a:p/>
+        </p:txBody>
       </p:sp>
       <p:sp>
         <p:nvSpPr>
@@ -4755,6 +4783,10 @@
           </a:solidFill>
           <a:ln/>
         </p:spPr>
+        <p:txBody>
+          <a:bodyPr/>
+          <a:p/>
+        </p:txBody>
       </p:sp>
     </p:spTree>
   </p:cSld>
@@ -4851,6 +4883,10 @@
             <a:prstDash val="solid"/>
           </a:ln>
         </p:spPr>
+        <p:txBody>
+          <a:bodyPr/>
+          <a:p/>
+        </p:txBody>
       </p:sp>
       <p:sp>
         <p:nvSpPr>
@@ -4915,6 +4951,10 @@
             <a:prstDash val="solid"/>
           </a:ln>
         </p:spPr>
+        <p:txBody>
+          <a:bodyPr/>
+          <a:p/>
+        </p:txBody>
       </p:sp>
       <p:sp>
         <p:nvSpPr>
@@ -4979,6 +5019,10 @@
             <a:prstDash val="solid"/>
           </a:ln>
         </p:spPr>
+        <p:txBody>
+          <a:bodyPr/>
+          <a:p/>
+        </p:txBody>
       </p:sp>
       <p:sp>
         <p:nvSpPr>
@@ -5192,6 +5236,10 @@
             <a:prstDash val="solid"/>
           </a:ln>
         </p:spPr>
+        <p:txBody>
+          <a:bodyPr/>
+          <a:p/>
+        </p:txBody>
       </p:sp>
       <p:sp>
         <p:nvSpPr>
@@ -5323,6 +5371,10 @@
             <a:prstDash val="solid"/>
           </a:ln>
         </p:spPr>
+        <p:txBody>
+          <a:bodyPr/>
+          <a:p/>
+        </p:txBody>
       </p:sp>
       <p:sp>
         <p:nvSpPr>
@@ -5382,6 +5434,10 @@
           </a:solidFill>
           <a:ln/>
         </p:spPr>
+        <p:txBody>
+          <a:bodyPr/>
+          <a:p/>
+        </p:txBody>
       </p:sp>
       <p:sp>
         <p:nvSpPr>
@@ -5441,6 +5497,10 @@
           </a:solidFill>
           <a:ln/>
         </p:spPr>
+        <p:txBody>
+          <a:bodyPr/>
+          <a:p/>
+        </p:txBody>
       </p:sp>
       <p:sp>
         <p:nvSpPr>
@@ -5461,6 +5521,10 @@
           </a:solidFill>
           <a:ln/>
         </p:spPr>
+        <p:txBody>
+          <a:bodyPr/>
+          <a:p/>
+        </p:txBody>
       </p:sp>
       <p:sp>
         <p:nvSpPr>
@@ -5520,6 +5584,10 @@
           </a:solidFill>
           <a:ln/>
         </p:spPr>
+        <p:txBody>
+          <a:bodyPr/>
+          <a:p/>
+        </p:txBody>
       </p:sp>
       <p:sp>
         <p:nvSpPr>
@@ -5540,6 +5608,10 @@
           </a:solidFill>
           <a:ln/>
         </p:spPr>
+        <p:txBody>
+          <a:bodyPr/>
+          <a:p/>
+        </p:txBody>
       </p:sp>
       <p:sp>
         <p:nvSpPr>
@@ -5675,6 +5747,10 @@
             <a:prstDash val="solid"/>
           </a:ln>
         </p:spPr>
+        <p:txBody>
+          <a:bodyPr/>
+          <a:p/>
+        </p:txBody>
       </p:sp>
       <p:sp>
         <p:nvSpPr>
@@ -5778,6 +5854,10 @@
             <a:prstDash val="solid"/>
           </a:ln>
         </p:spPr>
+        <p:txBody>
+          <a:bodyPr/>
+          <a:p/>
+        </p:txBody>
       </p:sp>
       <p:sp>
         <p:nvSpPr>
@@ -5881,6 +5961,10 @@
             <a:prstDash val="solid"/>
           </a:ln>
         </p:spPr>
+        <p:txBody>
+          <a:bodyPr/>
+          <a:p/>
+        </p:txBody>
       </p:sp>
       <p:sp>
         <p:nvSpPr>
@@ -5984,6 +6068,10 @@
             <a:prstDash val="solid"/>
           </a:ln>
         </p:spPr>
+        <p:txBody>
+          <a:bodyPr/>
+          <a:p/>
+        </p:txBody>
       </p:sp>
       <p:sp>
         <p:nvSpPr>
@@ -6087,6 +6175,10 @@
             <a:prstDash val="solid"/>
           </a:ln>
         </p:spPr>
+        <p:txBody>
+          <a:bodyPr/>
+          <a:p/>
+        </p:txBody>
       </p:sp>
       <p:sp>
         <p:nvSpPr>
@@ -6190,6 +6282,10 @@
             <a:prstDash val="solid"/>
           </a:ln>
         </p:spPr>
+        <p:txBody>
+          <a:bodyPr/>
+          <a:p/>
+        </p:txBody>
       </p:sp>
       <p:sp>
         <p:nvSpPr>
@@ -6364,6 +6460,10 @@
             <a:prstDash val="solid"/>
           </a:ln>
         </p:spPr>
+        <p:txBody>
+          <a:bodyPr/>
+          <a:p/>
+        </p:txBody>
       </p:sp>
       <p:sp>
         <p:nvSpPr>
@@ -6467,6 +6567,10 @@
             <a:prstDash val="solid"/>
           </a:ln>
         </p:spPr>
+        <p:txBody>
+          <a:bodyPr/>
+          <a:p/>
+        </p:txBody>
       </p:sp>
       <p:sp>
         <p:nvSpPr>
@@ -6570,6 +6674,10 @@
             <a:prstDash val="solid"/>
           </a:ln>
         </p:spPr>
+        <p:txBody>
+          <a:bodyPr/>
+          <a:p/>
+        </p:txBody>
       </p:sp>
       <p:sp>
         <p:nvSpPr>
@@ -6673,6 +6781,10 @@
             <a:prstDash val="solid"/>
           </a:ln>
         </p:spPr>
+        <p:txBody>
+          <a:bodyPr/>
+          <a:p/>
+        </p:txBody>
       </p:sp>
       <p:sp>
         <p:nvSpPr>
@@ -6776,6 +6888,10 @@
             <a:prstDash val="solid"/>
           </a:ln>
         </p:spPr>
+        <p:txBody>
+          <a:bodyPr/>
+          <a:p/>
+        </p:txBody>
       </p:sp>
       <p:sp>
         <p:nvSpPr>
@@ -6879,6 +6995,10 @@
             <a:prstDash val="solid"/>
           </a:ln>
         </p:spPr>
+        <p:txBody>
+          <a:bodyPr/>
+          <a:p/>
+        </p:txBody>
       </p:sp>
       <p:sp>
         <p:nvSpPr>
@@ -7053,6 +7173,10 @@
             <a:prstDash val="solid"/>
           </a:ln>
         </p:spPr>
+        <p:txBody>
+          <a:bodyPr/>
+          <a:p/>
+        </p:txBody>
       </p:sp>
       <p:sp>
         <p:nvSpPr>
@@ -7278,6 +7402,10 @@
           </a:solidFill>
           <a:ln/>
         </p:spPr>
+        <p:txBody>
+          <a:bodyPr/>
+          <a:p/>
+        </p:txBody>
       </p:sp>
     </p:spTree>
   </p:cSld>
@@ -7374,6 +7502,10 @@
             <a:prstDash val="solid"/>
           </a:ln>
         </p:spPr>
+        <p:txBody>
+          <a:bodyPr/>
+          <a:p/>
+        </p:txBody>
       </p:sp>
       <p:sp>
         <p:nvSpPr>
@@ -7583,6 +7715,10 @@
             <a:prstDash val="solid"/>
           </a:ln>
         </p:spPr>
+        <p:txBody>
+          <a:bodyPr/>
+          <a:p/>
+        </p:txBody>
       </p:sp>
       <p:sp>
         <p:nvSpPr>
@@ -7833,6 +7969,10 @@
           </a:solidFill>
           <a:ln/>
         </p:spPr>
+        <p:txBody>
+          <a:bodyPr/>
+          <a:p/>
+        </p:txBody>
       </p:sp>
     </p:spTree>
   </p:cSld>
@@ -7929,6 +8069,10 @@
             <a:prstDash val="solid"/>
           </a:ln>
         </p:spPr>
+        <p:txBody>
+          <a:bodyPr/>
+          <a:p/>
+        </p:txBody>
       </p:sp>
       <p:sp>
         <p:nvSpPr>
@@ -8166,6 +8310,10 @@
             <a:prstDash val="solid"/>
           </a:ln>
         </p:spPr>
+        <p:txBody>
+          <a:bodyPr/>
+          <a:p/>
+        </p:txBody>
       </p:sp>
       <p:sp>
         <p:nvSpPr>
@@ -8225,6 +8373,10 @@
           </a:solidFill>
           <a:ln/>
         </p:spPr>
+        <p:txBody>
+          <a:bodyPr/>
+          <a:p/>
+        </p:txBody>
       </p:sp>
       <p:sp>
         <p:nvSpPr>
@@ -8245,6 +8397,10 @@
           </a:solidFill>
           <a:ln/>
         </p:spPr>
+        <p:txBody>
+          <a:bodyPr/>
+          <a:p/>
+        </p:txBody>
       </p:sp>
       <p:sp>
         <p:nvSpPr>
@@ -8265,6 +8421,10 @@
           </a:solidFill>
           <a:ln/>
         </p:spPr>
+        <p:txBody>
+          <a:bodyPr/>
+          <a:p/>
+        </p:txBody>
       </p:sp>
       <p:sp>
         <p:nvSpPr>
@@ -8285,6 +8445,10 @@
           </a:solidFill>
           <a:ln/>
         </p:spPr>
+        <p:txBody>
+          <a:bodyPr/>
+          <a:p/>
+        </p:txBody>
       </p:sp>
       <p:sp>
         <p:nvSpPr>
@@ -8305,6 +8469,10 @@
           </a:solidFill>
           <a:ln/>
         </p:spPr>
+        <p:txBody>
+          <a:bodyPr/>
+          <a:p/>
+        </p:txBody>
       </p:sp>
       <p:sp>
         <p:nvSpPr>
@@ -8325,6 +8493,10 @@
           </a:solidFill>
           <a:ln/>
         </p:spPr>
+        <p:txBody>
+          <a:bodyPr/>
+          <a:p/>
+        </p:txBody>
       </p:sp>
       <p:sp>
         <p:nvSpPr>
@@ -8345,6 +8517,10 @@
           </a:solidFill>
           <a:ln/>
         </p:spPr>
+        <p:txBody>
+          <a:bodyPr/>
+          <a:p/>
+        </p:txBody>
       </p:sp>
       <p:sp>
         <p:nvSpPr>
@@ -8365,6 +8541,10 @@
           </a:solidFill>
           <a:ln/>
         </p:spPr>
+        <p:txBody>
+          <a:bodyPr/>
+          <a:p/>
+        </p:txBody>
       </p:sp>
       <p:sp>
         <p:nvSpPr>
@@ -8385,6 +8565,10 @@
           </a:solidFill>
           <a:ln/>
         </p:spPr>
+        <p:txBody>
+          <a:bodyPr/>
+          <a:p/>
+        </p:txBody>
       </p:sp>
       <p:sp>
         <p:nvSpPr>
@@ -8405,6 +8589,10 @@
           </a:solidFill>
           <a:ln/>
         </p:spPr>
+        <p:txBody>
+          <a:bodyPr/>
+          <a:p/>
+        </p:txBody>
       </p:sp>
       <p:sp>
         <p:nvSpPr>
@@ -8540,6 +8728,10 @@
             <a:prstDash val="solid"/>
           </a:ln>
         </p:spPr>
+        <p:txBody>
+          <a:bodyPr/>
+          <a:p/>
+        </p:txBody>
       </p:sp>
       <p:sp>
         <p:nvSpPr>
@@ -8777,6 +8969,10 @@
             <a:prstDash val="solid"/>
           </a:ln>
         </p:spPr>
+        <p:txBody>
+          <a:bodyPr/>
+          <a:p/>
+        </p:txBody>
       </p:sp>
       <p:sp>
         <p:nvSpPr>
@@ -9007,6 +9203,10 @@
             <a:prstDash val="solid"/>
           </a:ln>
         </p:spPr>
+        <p:txBody>
+          <a:bodyPr/>
+          <a:p/>
+        </p:txBody>
       </p:sp>
       <p:sp>
         <p:nvSpPr>
@@ -9216,6 +9416,10 @@
             <a:prstDash val="solid"/>
           </a:ln>
         </p:spPr>
+        <p:txBody>
+          <a:bodyPr/>
+          <a:p/>
+        </p:txBody>
       </p:sp>
       <p:sp>
         <p:nvSpPr>
@@ -9432,6 +9636,10 @@
             <a:prstDash val="solid"/>
           </a:ln>
         </p:spPr>
+        <p:txBody>
+          <a:bodyPr/>
+          <a:p/>
+        </p:txBody>
       </p:sp>
       <p:sp>
         <p:nvSpPr>
@@ -9577,6 +9785,10 @@
             <a:prstDash val="solid"/>
           </a:ln>
         </p:spPr>
+        <p:txBody>
+          <a:bodyPr/>
+          <a:p/>
+        </p:txBody>
       </p:sp>
       <p:sp>
         <p:nvSpPr>
@@ -9788,6 +10000,10 @@
           </a:solidFill>
           <a:ln/>
         </p:spPr>
+        <p:txBody>
+          <a:bodyPr/>
+          <a:p/>
+        </p:txBody>
       </p:sp>
       <p:sp>
         <p:nvSpPr>
@@ -10107,6 +10323,10 @@
             <a:prstDash val="solid"/>
           </a:ln>
         </p:spPr>
+        <p:txBody>
+          <a:bodyPr/>
+          <a:p/>
+        </p:txBody>
       </p:sp>
       <p:sp>
         <p:nvSpPr>
@@ -10127,6 +10347,10 @@
           </a:solidFill>
           <a:ln/>
         </p:spPr>
+        <p:txBody>
+          <a:bodyPr/>
+          <a:p/>
+        </p:txBody>
       </p:sp>
       <p:sp>
         <p:nvSpPr>
@@ -10186,6 +10410,10 @@
           </a:solidFill>
           <a:ln/>
         </p:spPr>
+        <p:txBody>
+          <a:bodyPr/>
+          <a:p/>
+        </p:txBody>
       </p:sp>
       <p:sp>
         <p:nvSpPr>
@@ -10245,6 +10473,10 @@
           </a:solidFill>
           <a:ln/>
         </p:spPr>
+        <p:txBody>
+          <a:bodyPr/>
+          <a:p/>
+        </p:txBody>
       </p:sp>
       <p:sp>
         <p:nvSpPr>
@@ -10304,6 +10536,10 @@
           </a:solidFill>
           <a:ln/>
         </p:spPr>
+        <p:txBody>
+          <a:bodyPr/>
+          <a:p/>
+        </p:txBody>
       </p:sp>
       <p:sp>
         <p:nvSpPr>
@@ -10363,6 +10599,10 @@
           </a:solidFill>
           <a:ln/>
         </p:spPr>
+        <p:txBody>
+          <a:bodyPr/>
+          <a:p/>
+        </p:txBody>
       </p:sp>
       <p:sp>
         <p:nvSpPr>
@@ -10427,6 +10667,10 @@
             <a:prstDash val="solid"/>
           </a:ln>
         </p:spPr>
+        <p:txBody>
+          <a:bodyPr/>
+          <a:p/>
+        </p:txBody>
       </p:sp>
       <p:sp>
         <p:nvSpPr>
@@ -10491,6 +10735,10 @@
             <a:prstDash val="solid"/>
           </a:ln>
         </p:spPr>
+        <p:txBody>
+          <a:bodyPr/>
+          <a:p/>
+        </p:txBody>
       </p:sp>
       <p:sp>
         <p:nvSpPr>
@@ -10555,6 +10803,10 @@
             <a:prstDash val="solid"/>
           </a:ln>
         </p:spPr>
+        <p:txBody>
+          <a:bodyPr/>
+          <a:p/>
+        </p:txBody>
       </p:sp>
       <p:sp>
         <p:nvSpPr>
@@ -10619,6 +10871,10 @@
             <a:prstDash val="solid"/>
           </a:ln>
         </p:spPr>
+        <p:txBody>
+          <a:bodyPr/>
+          <a:p/>
+        </p:txBody>
       </p:sp>
       <p:sp>
         <p:nvSpPr>
@@ -10683,6 +10939,10 @@
             <a:prstDash val="solid"/>
           </a:ln>
         </p:spPr>
+        <p:txBody>
+          <a:bodyPr/>
+          <a:p/>
+        </p:txBody>
       </p:sp>
       <p:sp>
         <p:nvSpPr>
@@ -10747,6 +11007,10 @@
             <a:prstDash val="solid"/>
           </a:ln>
         </p:spPr>
+        <p:txBody>
+          <a:bodyPr/>
+          <a:p/>
+        </p:txBody>
       </p:sp>
       <p:sp>
         <p:nvSpPr>
@@ -10811,6 +11075,10 @@
             <a:prstDash val="solid"/>
           </a:ln>
         </p:spPr>
+        <p:txBody>
+          <a:bodyPr/>
+          <a:p/>
+        </p:txBody>
       </p:sp>
       <p:sp>
         <p:nvSpPr>
@@ -10875,6 +11143,10 @@
             <a:prstDash val="solid"/>
           </a:ln>
         </p:spPr>
+        <p:txBody>
+          <a:bodyPr/>
+          <a:p/>
+        </p:txBody>
       </p:sp>
       <p:sp>
         <p:nvSpPr>
@@ -10939,6 +11211,10 @@
             <a:prstDash val="solid"/>
           </a:ln>
         </p:spPr>
+        <p:txBody>
+          <a:bodyPr/>
+          <a:p/>
+        </p:txBody>
       </p:sp>
       <p:sp>
         <p:nvSpPr>
@@ -11003,6 +11279,10 @@
             <a:prstDash val="solid"/>
           </a:ln>
         </p:spPr>
+        <p:txBody>
+          <a:bodyPr/>
+          <a:p/>
+        </p:txBody>
       </p:sp>
       <p:sp>
         <p:nvSpPr>
@@ -11067,6 +11347,10 @@
             <a:prstDash val="solid"/>
           </a:ln>
         </p:spPr>
+        <p:txBody>
+          <a:bodyPr/>
+          <a:p/>
+        </p:txBody>
       </p:sp>
       <p:sp>
         <p:nvSpPr>
@@ -11131,6 +11415,10 @@
             <a:prstDash val="solid"/>
           </a:ln>
         </p:spPr>
+        <p:txBody>
+          <a:bodyPr/>
+          <a:p/>
+        </p:txBody>
       </p:sp>
       <p:sp>
         <p:nvSpPr>
@@ -11195,6 +11483,10 @@
             <a:prstDash val="solid"/>
           </a:ln>
         </p:spPr>
+        <p:txBody>
+          <a:bodyPr/>
+          <a:p/>
+        </p:txBody>
       </p:sp>
       <p:sp>
         <p:nvSpPr>
@@ -11259,6 +11551,10 @@
             <a:prstDash val="solid"/>
           </a:ln>
         </p:spPr>
+        <p:txBody>
+          <a:bodyPr/>
+          <a:p/>
+        </p:txBody>
       </p:sp>
       <p:sp>
         <p:nvSpPr>
@@ -11323,6 +11619,10 @@
             <a:prstDash val="solid"/>
           </a:ln>
         </p:spPr>
+        <p:txBody>
+          <a:bodyPr/>
+          <a:p/>
+        </p:txBody>
       </p:sp>
       <p:sp>
         <p:nvSpPr>
@@ -11387,6 +11687,10 @@
             <a:prstDash val="solid"/>
           </a:ln>
         </p:spPr>
+        <p:txBody>
+          <a:bodyPr/>
+          <a:p/>
+        </p:txBody>
       </p:sp>
       <p:sp>
         <p:nvSpPr>
@@ -11451,6 +11755,10 @@
             <a:prstDash val="solid"/>
           </a:ln>
         </p:spPr>
+        <p:txBody>
+          <a:bodyPr/>
+          <a:p/>
+        </p:txBody>
       </p:sp>
       <p:sp>
         <p:nvSpPr>
@@ -11515,6 +11823,10 @@
             <a:prstDash val="solid"/>
           </a:ln>
         </p:spPr>
+        <p:txBody>
+          <a:bodyPr/>
+          <a:p/>
+        </p:txBody>
       </p:sp>
       <p:sp>
         <p:nvSpPr>
@@ -11579,6 +11891,10 @@
             <a:prstDash val="solid"/>
           </a:ln>
         </p:spPr>
+        <p:txBody>
+          <a:bodyPr/>
+          <a:p/>
+        </p:txBody>
       </p:sp>
       <p:sp>
         <p:nvSpPr>
@@ -11643,6 +11959,10 @@
             <a:prstDash val="solid"/>
           </a:ln>
         </p:spPr>
+        <p:txBody>
+          <a:bodyPr/>
+          <a:p/>
+        </p:txBody>
       </p:sp>
       <p:sp>
         <p:nvSpPr>
@@ -11707,6 +12027,10 @@
             <a:prstDash val="solid"/>
           </a:ln>
         </p:spPr>
+        <p:txBody>
+          <a:bodyPr/>
+          <a:p/>
+        </p:txBody>
       </p:sp>
       <p:sp>
         <p:nvSpPr>
@@ -11771,6 +12095,10 @@
             <a:prstDash val="solid"/>
           </a:ln>
         </p:spPr>
+        <p:txBody>
+          <a:bodyPr/>
+          <a:p/>
+        </p:txBody>
       </p:sp>
       <p:sp>
         <p:nvSpPr>
@@ -11835,6 +12163,10 @@
             <a:prstDash val="solid"/>
           </a:ln>
         </p:spPr>
+        <p:txBody>
+          <a:bodyPr/>
+          <a:p/>
+        </p:txBody>
       </p:sp>
       <p:sp>
         <p:nvSpPr>
@@ -11899,6 +12231,10 @@
             <a:prstDash val="solid"/>
           </a:ln>
         </p:spPr>
+        <p:txBody>
+          <a:bodyPr/>
+          <a:p/>
+        </p:txBody>
       </p:sp>
       <p:sp>
         <p:nvSpPr>
@@ -11963,6 +12299,10 @@
             <a:prstDash val="solid"/>
           </a:ln>
         </p:spPr>
+        <p:txBody>
+          <a:bodyPr/>
+          <a:p/>
+        </p:txBody>
       </p:sp>
       <p:sp>
         <p:nvSpPr>
@@ -12137,6 +12477,10 @@
             <a:prstDash val="solid"/>
           </a:ln>
         </p:spPr>
+        <p:txBody>
+          <a:bodyPr/>
+          <a:p/>
+        </p:txBody>
       </p:sp>
       <p:sp>
         <p:nvSpPr>
@@ -12282,6 +12626,10 @@
             <a:prstDash val="solid"/>
           </a:ln>
         </p:spPr>
+        <p:txBody>
+          <a:bodyPr/>
+          <a:p/>
+        </p:txBody>
       </p:sp>
       <p:sp>
         <p:nvSpPr>
@@ -12341,6 +12689,10 @@
           </a:solidFill>
           <a:ln/>
         </p:spPr>
+        <p:txBody>
+          <a:bodyPr/>
+          <a:p/>
+        </p:txBody>
       </p:sp>
       <p:sp>
         <p:nvSpPr>
@@ -12400,6 +12752,10 @@
           </a:solidFill>
           <a:ln/>
         </p:spPr>
+        <p:txBody>
+          <a:bodyPr/>
+          <a:p/>
+        </p:txBody>
       </p:sp>
       <p:sp>
         <p:nvSpPr>
@@ -12459,6 +12815,10 @@
           </a:solidFill>
           <a:ln/>
         </p:spPr>
+        <p:txBody>
+          <a:bodyPr/>
+          <a:p/>
+        </p:txBody>
       </p:sp>
       <p:sp>
         <p:nvSpPr>
@@ -12518,6 +12878,10 @@
           </a:solidFill>
           <a:ln/>
         </p:spPr>
+        <p:txBody>
+          <a:bodyPr/>
+          <a:p/>
+        </p:txBody>
       </p:sp>
       <p:sp>
         <p:nvSpPr>
@@ -12653,6 +13017,10 @@
             <a:prstDash val="solid"/>
           </a:ln>
         </p:spPr>
+        <p:txBody>
+          <a:bodyPr/>
+          <a:p/>
+        </p:txBody>
       </p:sp>
       <p:sp>
         <p:nvSpPr>
@@ -12798,6 +13166,10 @@
             <a:prstDash val="solid"/>
           </a:ln>
         </p:spPr>
+        <p:txBody>
+          <a:bodyPr/>
+          <a:p/>
+        </p:txBody>
       </p:sp>
       <p:sp>
         <p:nvSpPr>
@@ -13014,6 +13386,10 @@
             <a:prstDash val="solid"/>
           </a:ln>
         </p:spPr>
+        <p:txBody>
+          <a:bodyPr/>
+          <a:p/>
+        </p:txBody>
       </p:sp>
       <p:sp>
         <p:nvSpPr>
@@ -13154,6 +13530,10 @@
           </a:solidFill>
           <a:ln/>
         </p:spPr>
+        <p:txBody>
+          <a:bodyPr/>
+          <a:p/>
+        </p:txBody>
       </p:sp>
       <p:sp>
         <p:nvSpPr>
@@ -13174,6 +13554,10 @@
           </a:solidFill>
           <a:ln/>
         </p:spPr>
+        <p:txBody>
+          <a:bodyPr/>
+          <a:p/>
+        </p:txBody>
       </p:sp>
       <p:sp>
         <p:nvSpPr>
@@ -13194,6 +13578,10 @@
           </a:solidFill>
           <a:ln/>
         </p:spPr>
+        <p:txBody>
+          <a:bodyPr/>
+          <a:p/>
+        </p:txBody>
       </p:sp>
       <p:sp>
         <p:nvSpPr>
@@ -13219,6 +13607,10 @@
             <a:prstDash val="solid"/>
           </a:ln>
         </p:spPr>
+        <p:txBody>
+          <a:bodyPr/>
+          <a:p/>
+        </p:txBody>
       </p:sp>
       <p:sp>
         <p:nvSpPr>
@@ -13435,6 +13827,10 @@
             <a:prstDash val="solid"/>
           </a:ln>
         </p:spPr>
+        <p:txBody>
+          <a:bodyPr/>
+          <a:p/>
+        </p:txBody>
       </p:sp>
       <p:sp>
         <p:nvSpPr>
@@ -13640,6 +14036,10 @@
             <a:prstDash val="solid"/>
           </a:ln>
         </p:spPr>
+        <p:txBody>
+          <a:bodyPr/>
+          <a:p/>
+        </p:txBody>
       </p:sp>
       <p:sp>
         <p:nvSpPr>
@@ -13799,6 +14199,10 @@
             <a:prstDash val="solid"/>
           </a:ln>
         </p:spPr>
+        <p:txBody>
+          <a:bodyPr/>
+          <a:p/>
+        </p:txBody>
       </p:sp>
       <p:sp>
         <p:nvSpPr>
@@ -14029,6 +14433,10 @@
             <a:prstDash val="solid"/>
           </a:ln>
         </p:spPr>
+        <p:txBody>
+          <a:bodyPr/>
+          <a:p/>
+        </p:txBody>
       </p:sp>
       <p:sp>
         <p:nvSpPr>
@@ -14234,6 +14642,10 @@
             <a:prstDash val="solid"/>
           </a:ln>
         </p:spPr>
+        <p:txBody>
+          <a:bodyPr/>
+          <a:p/>
+        </p:txBody>
       </p:sp>
       <p:sp>
         <p:nvSpPr>
@@ -14254,6 +14666,10 @@
           </a:solidFill>
           <a:ln/>
         </p:spPr>
+        <p:txBody>
+          <a:bodyPr/>
+          <a:p/>
+        </p:txBody>
       </p:sp>
       <p:sp>
         <p:nvSpPr>
@@ -14357,6 +14773,10 @@
             <a:prstDash val="solid"/>
           </a:ln>
         </p:spPr>
+        <p:txBody>
+          <a:bodyPr/>
+          <a:p/>
+        </p:txBody>
       </p:sp>
       <p:sp>
         <p:nvSpPr>
@@ -14377,6 +14797,10 @@
           </a:solidFill>
           <a:ln/>
         </p:spPr>
+        <p:txBody>
+          <a:bodyPr/>
+          <a:p/>
+        </p:txBody>
       </p:sp>
       <p:sp>
         <p:nvSpPr>
@@ -14480,6 +14904,10 @@
             <a:prstDash val="solid"/>
           </a:ln>
         </p:spPr>
+        <p:txBody>
+          <a:bodyPr/>
+          <a:p/>
+        </p:txBody>
       </p:sp>
       <p:sp>
         <p:nvSpPr>
@@ -14500,6 +14928,10 @@
           </a:solidFill>
           <a:ln/>
         </p:spPr>
+        <p:txBody>
+          <a:bodyPr/>
+          <a:p/>
+        </p:txBody>
       </p:sp>
       <p:sp>
         <p:nvSpPr>
@@ -14708,6 +15140,10 @@
           </a:solidFill>
           <a:ln/>
         </p:spPr>
+        <p:txBody>
+          <a:bodyPr/>
+          <a:p/>
+        </p:txBody>
       </p:sp>
       <p:sp>
         <p:nvSpPr>
@@ -14772,6 +15208,10 @@
             <a:prstDash val="solid"/>
           </a:ln>
         </p:spPr>
+        <p:txBody>
+          <a:bodyPr/>
+          <a:p/>
+        </p:txBody>
       </p:sp>
       <p:sp>
         <p:nvSpPr>
@@ -15036,6 +15476,10 @@
           </a:solidFill>
           <a:ln/>
         </p:spPr>
+        <p:txBody>
+          <a:bodyPr/>
+          <a:p/>
+        </p:txBody>
       </p:sp>
       <p:sp>
         <p:nvSpPr>
@@ -15070,7 +15514,7 @@
                 <a:ea typeface="Calibri" pitchFamily="34" charset="-122"/>
                 <a:cs typeface="Calibri" pitchFamily="34" charset="-120"/>
               </a:rPr>
-              <a:t>Proxiant AI Academy</a:t>
+              <a:t>Proxiant Academy</a:t>
             </a:r>
             <a:endParaRPr lang="en-US" sz="1300" dirty="0"/>
           </a:p>
@@ -15188,6 +15632,10 @@
             <a:prstDash val="solid"/>
           </a:ln>
         </p:spPr>
+        <p:txBody>
+          <a:bodyPr/>
+          <a:p/>
+        </p:txBody>
       </p:sp>
       <p:sp>
         <p:nvSpPr>
@@ -15208,6 +15656,10 @@
           </a:solidFill>
           <a:ln/>
         </p:spPr>
+        <p:txBody>
+          <a:bodyPr/>
+          <a:p/>
+        </p:txBody>
       </p:sp>
       <p:sp>
         <p:nvSpPr>
@@ -15306,6 +15758,10 @@
           </a:solidFill>
           <a:ln/>
         </p:spPr>
+        <p:txBody>
+          <a:bodyPr/>
+          <a:p/>
+        </p:txBody>
       </p:sp>
       <p:sp>
         <p:nvSpPr>
@@ -15404,6 +15860,10 @@
           </a:solidFill>
           <a:ln/>
         </p:spPr>
+        <p:txBody>
+          <a:bodyPr/>
+          <a:p/>
+        </p:txBody>
       </p:sp>
       <p:sp>
         <p:nvSpPr>
@@ -15502,6 +15962,10 @@
           </a:solidFill>
           <a:ln/>
         </p:spPr>
+        <p:txBody>
+          <a:bodyPr/>
+          <a:p/>
+        </p:txBody>
       </p:sp>
       <p:sp>
         <p:nvSpPr>
@@ -15715,6 +16179,10 @@
             <a:prstDash val="solid"/>
           </a:ln>
         </p:spPr>
+        <p:txBody>
+          <a:bodyPr/>
+          <a:p/>
+        </p:txBody>
       </p:sp>
       <p:sp>
         <p:nvSpPr>
@@ -15860,6 +16328,10 @@
             <a:prstDash val="solid"/>
           </a:ln>
         </p:spPr>
+        <p:txBody>
+          <a:bodyPr/>
+          <a:p/>
+        </p:txBody>
       </p:sp>
       <p:sp>
         <p:nvSpPr>
@@ -16071,6 +16543,10 @@
           </a:solidFill>
           <a:ln/>
         </p:spPr>
+        <p:txBody>
+          <a:bodyPr/>
+          <a:p/>
+        </p:txBody>
       </p:sp>
       <p:sp>
         <p:nvSpPr>
@@ -16169,6 +16645,10 @@
           </a:solidFill>
           <a:ln/>
         </p:spPr>
+        <p:txBody>
+          <a:bodyPr/>
+          <a:p/>
+        </p:txBody>
       </p:sp>
       <p:sp>
         <p:nvSpPr>
@@ -16267,6 +16747,10 @@
           </a:solidFill>
           <a:ln/>
         </p:spPr>
+        <p:txBody>
+          <a:bodyPr/>
+          <a:p/>
+        </p:txBody>
       </p:sp>
       <p:sp>
         <p:nvSpPr>
@@ -16365,6 +16849,10 @@
           </a:solidFill>
           <a:ln/>
         </p:spPr>
+        <p:txBody>
+          <a:bodyPr/>
+          <a:p/>
+        </p:txBody>
       </p:sp>
       <p:sp>
         <p:nvSpPr>
@@ -16463,6 +16951,10 @@
           </a:solidFill>
           <a:ln/>
         </p:spPr>
+        <p:txBody>
+          <a:bodyPr/>
+          <a:p/>
+        </p:txBody>
       </p:sp>
       <p:sp>
         <p:nvSpPr>
@@ -16561,6 +17053,10 @@
           </a:solidFill>
           <a:ln/>
         </p:spPr>
+        <p:txBody>
+          <a:bodyPr/>
+          <a:p/>
+        </p:txBody>
       </p:sp>
       <p:sp>
         <p:nvSpPr>
@@ -16735,6 +17231,10 @@
             <a:prstDash val="solid"/>
           </a:ln>
         </p:spPr>
+        <p:txBody>
+          <a:bodyPr/>
+          <a:p/>
+        </p:txBody>
       </p:sp>
       <p:sp>
         <p:nvSpPr>
@@ -16794,6 +17294,10 @@
           </a:solidFill>
           <a:ln/>
         </p:spPr>
+        <p:txBody>
+          <a:bodyPr/>
+          <a:p/>
+        </p:txBody>
       </p:sp>
       <p:sp>
         <p:nvSpPr>
@@ -16858,6 +17362,10 @@
             <a:prstDash val="solid"/>
           </a:ln>
         </p:spPr>
+        <p:txBody>
+          <a:bodyPr/>
+          <a:p/>
+        </p:txBody>
       </p:sp>
       <p:sp>
         <p:nvSpPr>
@@ -16917,6 +17425,10 @@
           </a:solidFill>
           <a:ln/>
         </p:spPr>
+        <p:txBody>
+          <a:bodyPr/>
+          <a:p/>
+        </p:txBody>
       </p:sp>
       <p:sp>
         <p:nvSpPr>
@@ -16981,6 +17493,10 @@
             <a:prstDash val="solid"/>
           </a:ln>
         </p:spPr>
+        <p:txBody>
+          <a:bodyPr/>
+          <a:p/>
+        </p:txBody>
       </p:sp>
       <p:sp>
         <p:nvSpPr>
@@ -17040,6 +17556,10 @@
           </a:solidFill>
           <a:ln/>
         </p:spPr>
+        <p:txBody>
+          <a:bodyPr/>
+          <a:p/>
+        </p:txBody>
       </p:sp>
       <p:sp>
         <p:nvSpPr>
@@ -17170,6 +17690,10 @@
           </a:solidFill>
           <a:ln/>
         </p:spPr>
+        <p:txBody>
+          <a:bodyPr/>
+          <a:p/>
+        </p:txBody>
       </p:sp>
       <p:sp>
         <p:nvSpPr>
@@ -17268,6 +17792,10 @@
           </a:solidFill>
           <a:ln/>
         </p:spPr>
+        <p:txBody>
+          <a:bodyPr/>
+          <a:p/>
+        </p:txBody>
       </p:sp>
       <p:sp>
         <p:nvSpPr>
@@ -17366,6 +17894,10 @@
           </a:solidFill>
           <a:ln/>
         </p:spPr>
+        <p:txBody>
+          <a:bodyPr/>
+          <a:p/>
+        </p:txBody>
       </p:sp>
       <p:sp>
         <p:nvSpPr>
@@ -17464,6 +17996,10 @@
           </a:solidFill>
           <a:ln/>
         </p:spPr>
+        <p:txBody>
+          <a:bodyPr/>
+          <a:p/>
+        </p:txBody>
       </p:sp>
       <p:sp>
         <p:nvSpPr>
@@ -17562,6 +18098,10 @@
           </a:solidFill>
           <a:ln/>
         </p:spPr>
+        <p:txBody>
+          <a:bodyPr/>
+          <a:p/>
+        </p:txBody>
       </p:sp>
       <p:sp>
         <p:nvSpPr>
@@ -17660,6 +18200,10 @@
           </a:solidFill>
           <a:ln/>
         </p:spPr>
+        <p:txBody>
+          <a:bodyPr/>
+          <a:p/>
+        </p:txBody>
       </p:sp>
       <p:sp>
         <p:nvSpPr>
@@ -17829,6 +18373,10 @@
           </a:solidFill>
           <a:ln/>
         </p:spPr>
+        <p:txBody>
+          <a:bodyPr/>
+          <a:p/>
+        </p:txBody>
       </p:sp>
       <p:sp>
         <p:nvSpPr>
@@ -17888,6 +18436,10 @@
           </a:solidFill>
           <a:ln/>
         </p:spPr>
+        <p:txBody>
+          <a:bodyPr/>
+          <a:p/>
+        </p:txBody>
       </p:sp>
       <p:sp>
         <p:nvSpPr>
@@ -17947,6 +18499,10 @@
           </a:solidFill>
           <a:ln/>
         </p:spPr>
+        <p:txBody>
+          <a:bodyPr/>
+          <a:p/>
+        </p:txBody>
       </p:sp>
       <p:sp>
         <p:nvSpPr>
@@ -18006,6 +18562,10 @@
           </a:solidFill>
           <a:ln/>
         </p:spPr>
+        <p:txBody>
+          <a:bodyPr/>
+          <a:p/>
+        </p:txBody>
       </p:sp>
       <p:sp>
         <p:nvSpPr>
@@ -18065,6 +18625,10 @@
           </a:solidFill>
           <a:ln/>
         </p:spPr>
+        <p:txBody>
+          <a:bodyPr/>
+          <a:p/>
+        </p:txBody>
       </p:sp>
       <p:sp>
         <p:nvSpPr>
